--- a/templates/worship-files/71_歡迎你.pptx
+++ b/templates/worship-files/71_歡迎你.pptx
@@ -105,7 +105,21 @@
       </a:defRPr>
     </a:lvl9pPr>
   </p:defaultTextStyle>
+  <p:extLst>
+    <p:ext uri="{EFAFB233-063F-42B5-8137-9DF3F51BA10A}">
+      <p15:sldGuideLst xmlns:p15="http://schemas.microsoft.com/office/powerpoint/2012/main"/>
+    </p:ext>
+  </p:extLst>
 </p:presentation>
+</file>
+
+<file path=ppt/revisionInfo.xml><?xml version="1.0" encoding="utf-8"?>
+<p1510:revInfo xmlns:a="http://schemas.openxmlformats.org/drawingml/2006/main" xmlns:r="http://schemas.openxmlformats.org/officeDocument/2006/relationships" xmlns:p1510="http://schemas.microsoft.com/office/powerpoint/2015/10/main">
+  <p1510:revLst>
+    <p1510:client id="{00000000-0000-0000-0000-000000000000}" v="12" dt="2026-09-01T16:43:35.114"/>
+    <p1510:client id="{821D6C69-1F2B-6B88-8EB5-E8F7D43E7186}" v="250" dt="2026-09-01T19:32:12.304"/>
+  </p1510:revLst>
+</p1510:revInfo>
 </file>
 
 <file path=ppt/slideLayouts/slideLayout1.xml><?xml version="1.0" encoding="utf-8"?>
@@ -150,7 +164,7 @@
           </a:lstStyle>
           <a:p>
             <a:r>
-              <a:rPr lang="zh-TW" altLang="en-US" smtClean="0"/>
+              <a:rPr lang="zh-TW" altLang="en-US"/>
               <a:t>按一下以編輯母片標題樣式</a:t>
             </a:r>
             <a:endParaRPr lang="zh-HK" altLang="en-US"/>
@@ -215,7 +229,7 @@
           </a:lstStyle>
           <a:p>
             <a:r>
-              <a:rPr lang="zh-TW" altLang="en-US" smtClean="0"/>
+              <a:rPr lang="zh-TW" altLang="en-US"/>
               <a:t>按一下以編輯母片副標題樣式</a:t>
             </a:r>
             <a:endParaRPr lang="zh-HK" altLang="en-US"/>
@@ -239,7 +253,7 @@
           <a:p>
             <a:fld id="{B6108ED8-30D0-49CE-A407-2D3D905DC7AD}" type="datetimeFigureOut">
               <a:rPr lang="zh-HK" altLang="en-US" smtClean="0"/>
-              <a:t>27/12/2025</a:t>
+              <a:t>1/9/2026</a:t>
             </a:fld>
             <a:endParaRPr lang="zh-HK" altLang="en-US"/>
           </a:p>
@@ -333,7 +347,7 @@
           <a:lstStyle/>
           <a:p>
             <a:r>
-              <a:rPr lang="zh-TW" altLang="en-US" smtClean="0"/>
+              <a:rPr lang="zh-TW" altLang="en-US"/>
               <a:t>按一下以編輯母片標題樣式</a:t>
             </a:r>
             <a:endParaRPr lang="zh-HK" altLang="en-US"/>
@@ -357,35 +371,35 @@
           <a:p>
             <a:pPr lvl="0"/>
             <a:r>
-              <a:rPr lang="zh-TW" altLang="en-US" smtClean="0"/>
+              <a:rPr lang="zh-TW" altLang="en-US"/>
               <a:t>按一下以編輯母片文字樣式</a:t>
             </a:r>
           </a:p>
           <a:p>
             <a:pPr lvl="1"/>
             <a:r>
-              <a:rPr lang="zh-TW" altLang="en-US" smtClean="0"/>
+              <a:rPr lang="zh-TW" altLang="en-US"/>
               <a:t>第二層</a:t>
             </a:r>
           </a:p>
           <a:p>
             <a:pPr lvl="2"/>
             <a:r>
-              <a:rPr lang="zh-TW" altLang="en-US" smtClean="0"/>
+              <a:rPr lang="zh-TW" altLang="en-US"/>
               <a:t>第三層</a:t>
             </a:r>
           </a:p>
           <a:p>
             <a:pPr lvl="3"/>
             <a:r>
-              <a:rPr lang="zh-TW" altLang="en-US" smtClean="0"/>
+              <a:rPr lang="zh-TW" altLang="en-US"/>
               <a:t>第四層</a:t>
             </a:r>
           </a:p>
           <a:p>
             <a:pPr lvl="4"/>
             <a:r>
-              <a:rPr lang="zh-TW" altLang="en-US" smtClean="0"/>
+              <a:rPr lang="zh-TW" altLang="en-US"/>
               <a:t>第五層</a:t>
             </a:r>
             <a:endParaRPr lang="zh-HK" altLang="en-US"/>
@@ -409,7 +423,7 @@
           <a:p>
             <a:fld id="{B6108ED8-30D0-49CE-A407-2D3D905DC7AD}" type="datetimeFigureOut">
               <a:rPr lang="zh-HK" altLang="en-US" smtClean="0"/>
-              <a:t>27/12/2025</a:t>
+              <a:t>1/9/2026</a:t>
             </a:fld>
             <a:endParaRPr lang="zh-HK" altLang="en-US"/>
           </a:p>
@@ -508,7 +522,7 @@
           <a:lstStyle/>
           <a:p>
             <a:r>
-              <a:rPr lang="zh-TW" altLang="en-US" smtClean="0"/>
+              <a:rPr lang="zh-TW" altLang="en-US"/>
               <a:t>按一下以編輯母片標題樣式</a:t>
             </a:r>
             <a:endParaRPr lang="zh-HK" altLang="en-US"/>
@@ -537,35 +551,35 @@
           <a:p>
             <a:pPr lvl="0"/>
             <a:r>
-              <a:rPr lang="zh-TW" altLang="en-US" smtClean="0"/>
+              <a:rPr lang="zh-TW" altLang="en-US"/>
               <a:t>按一下以編輯母片文字樣式</a:t>
             </a:r>
           </a:p>
           <a:p>
             <a:pPr lvl="1"/>
             <a:r>
-              <a:rPr lang="zh-TW" altLang="en-US" smtClean="0"/>
+              <a:rPr lang="zh-TW" altLang="en-US"/>
               <a:t>第二層</a:t>
             </a:r>
           </a:p>
           <a:p>
             <a:pPr lvl="2"/>
             <a:r>
-              <a:rPr lang="zh-TW" altLang="en-US" smtClean="0"/>
+              <a:rPr lang="zh-TW" altLang="en-US"/>
               <a:t>第三層</a:t>
             </a:r>
           </a:p>
           <a:p>
             <a:pPr lvl="3"/>
             <a:r>
-              <a:rPr lang="zh-TW" altLang="en-US" smtClean="0"/>
+              <a:rPr lang="zh-TW" altLang="en-US"/>
               <a:t>第四層</a:t>
             </a:r>
           </a:p>
           <a:p>
             <a:pPr lvl="4"/>
             <a:r>
-              <a:rPr lang="zh-TW" altLang="en-US" smtClean="0"/>
+              <a:rPr lang="zh-TW" altLang="en-US"/>
               <a:t>第五層</a:t>
             </a:r>
             <a:endParaRPr lang="zh-HK" altLang="en-US"/>
@@ -589,7 +603,7 @@
           <a:p>
             <a:fld id="{B6108ED8-30D0-49CE-A407-2D3D905DC7AD}" type="datetimeFigureOut">
               <a:rPr lang="zh-HK" altLang="en-US" smtClean="0"/>
-              <a:t>27/12/2025</a:t>
+              <a:t>1/9/2026</a:t>
             </a:fld>
             <a:endParaRPr lang="zh-HK" altLang="en-US"/>
           </a:p>
@@ -684,7 +698,7 @@
           <a:p>
             <a:fld id="{E1FA0923-53A4-4EF9-8D36-2211106C1081}" type="datetimeFigureOut">
               <a:rPr lang="zh-HK" altLang="en-US" smtClean="0"/>
-              <a:t>27/12/2025</a:t>
+              <a:t>1/9/2026</a:t>
             </a:fld>
             <a:endParaRPr lang="zh-HK" altLang="en-US"/>
           </a:p>
@@ -778,7 +792,7 @@
           <a:lstStyle/>
           <a:p>
             <a:r>
-              <a:rPr lang="zh-TW" altLang="en-US" smtClean="0"/>
+              <a:rPr lang="zh-TW" altLang="en-US"/>
               <a:t>按一下以編輯母片標題樣式</a:t>
             </a:r>
             <a:endParaRPr lang="zh-HK" altLang="en-US"/>
@@ -802,35 +816,35 @@
           <a:p>
             <a:pPr lvl="0"/>
             <a:r>
-              <a:rPr lang="zh-TW" altLang="en-US" smtClean="0"/>
+              <a:rPr lang="zh-TW" altLang="en-US"/>
               <a:t>按一下以編輯母片文字樣式</a:t>
             </a:r>
           </a:p>
           <a:p>
             <a:pPr lvl="1"/>
             <a:r>
-              <a:rPr lang="zh-TW" altLang="en-US" smtClean="0"/>
+              <a:rPr lang="zh-TW" altLang="en-US"/>
               <a:t>第二層</a:t>
             </a:r>
           </a:p>
           <a:p>
             <a:pPr lvl="2"/>
             <a:r>
-              <a:rPr lang="zh-TW" altLang="en-US" smtClean="0"/>
+              <a:rPr lang="zh-TW" altLang="en-US"/>
               <a:t>第三層</a:t>
             </a:r>
           </a:p>
           <a:p>
             <a:pPr lvl="3"/>
             <a:r>
-              <a:rPr lang="zh-TW" altLang="en-US" smtClean="0"/>
+              <a:rPr lang="zh-TW" altLang="en-US"/>
               <a:t>第四層</a:t>
             </a:r>
           </a:p>
           <a:p>
             <a:pPr lvl="4"/>
             <a:r>
-              <a:rPr lang="zh-TW" altLang="en-US" smtClean="0"/>
+              <a:rPr lang="zh-TW" altLang="en-US"/>
               <a:t>第五層</a:t>
             </a:r>
             <a:endParaRPr lang="zh-HK" altLang="en-US"/>
@@ -854,7 +868,7 @@
           <a:p>
             <a:fld id="{B6108ED8-30D0-49CE-A407-2D3D905DC7AD}" type="datetimeFigureOut">
               <a:rPr lang="zh-HK" altLang="en-US" smtClean="0"/>
-              <a:t>27/12/2025</a:t>
+              <a:t>1/9/2026</a:t>
             </a:fld>
             <a:endParaRPr lang="zh-HK" altLang="en-US"/>
           </a:p>
@@ -957,7 +971,7 @@
           </a:lstStyle>
           <a:p>
             <a:r>
-              <a:rPr lang="zh-TW" altLang="en-US" smtClean="0"/>
+              <a:rPr lang="zh-TW" altLang="en-US"/>
               <a:t>按一下以編輯母片標題樣式</a:t>
             </a:r>
             <a:endParaRPr lang="zh-HK" altLang="en-US"/>
@@ -1077,7 +1091,7 @@
           <a:p>
             <a:pPr lvl="0"/>
             <a:r>
-              <a:rPr lang="zh-TW" altLang="en-US" smtClean="0"/>
+              <a:rPr lang="zh-TW" altLang="en-US"/>
               <a:t>按一下以編輯母片文字樣式</a:t>
             </a:r>
           </a:p>
@@ -1100,7 +1114,7 @@
           <a:p>
             <a:fld id="{B6108ED8-30D0-49CE-A407-2D3D905DC7AD}" type="datetimeFigureOut">
               <a:rPr lang="zh-HK" altLang="en-US" smtClean="0"/>
-              <a:t>27/12/2025</a:t>
+              <a:t>1/9/2026</a:t>
             </a:fld>
             <a:endParaRPr lang="zh-HK" altLang="en-US"/>
           </a:p>
@@ -1194,7 +1208,7 @@
           <a:lstStyle/>
           <a:p>
             <a:r>
-              <a:rPr lang="zh-TW" altLang="en-US" smtClean="0"/>
+              <a:rPr lang="zh-TW" altLang="en-US"/>
               <a:t>按一下以編輯母片標題樣式</a:t>
             </a:r>
             <a:endParaRPr lang="zh-HK" altLang="en-US"/>
@@ -1223,35 +1237,35 @@
           <a:p>
             <a:pPr lvl="0"/>
             <a:r>
-              <a:rPr lang="zh-TW" altLang="en-US" smtClean="0"/>
+              <a:rPr lang="zh-TW" altLang="en-US"/>
               <a:t>按一下以編輯母片文字樣式</a:t>
             </a:r>
           </a:p>
           <a:p>
             <a:pPr lvl="1"/>
             <a:r>
-              <a:rPr lang="zh-TW" altLang="en-US" smtClean="0"/>
+              <a:rPr lang="zh-TW" altLang="en-US"/>
               <a:t>第二層</a:t>
             </a:r>
           </a:p>
           <a:p>
             <a:pPr lvl="2"/>
             <a:r>
-              <a:rPr lang="zh-TW" altLang="en-US" smtClean="0"/>
+              <a:rPr lang="zh-TW" altLang="en-US"/>
               <a:t>第三層</a:t>
             </a:r>
           </a:p>
           <a:p>
             <a:pPr lvl="3"/>
             <a:r>
-              <a:rPr lang="zh-TW" altLang="en-US" smtClean="0"/>
+              <a:rPr lang="zh-TW" altLang="en-US"/>
               <a:t>第四層</a:t>
             </a:r>
           </a:p>
           <a:p>
             <a:pPr lvl="4"/>
             <a:r>
-              <a:rPr lang="zh-TW" altLang="en-US" smtClean="0"/>
+              <a:rPr lang="zh-TW" altLang="en-US"/>
               <a:t>第五層</a:t>
             </a:r>
             <a:endParaRPr lang="zh-HK" altLang="en-US"/>
@@ -1280,35 +1294,35 @@
           <a:p>
             <a:pPr lvl="0"/>
             <a:r>
-              <a:rPr lang="zh-TW" altLang="en-US" smtClean="0"/>
+              <a:rPr lang="zh-TW" altLang="en-US"/>
               <a:t>按一下以編輯母片文字樣式</a:t>
             </a:r>
           </a:p>
           <a:p>
             <a:pPr lvl="1"/>
             <a:r>
-              <a:rPr lang="zh-TW" altLang="en-US" smtClean="0"/>
+              <a:rPr lang="zh-TW" altLang="en-US"/>
               <a:t>第二層</a:t>
             </a:r>
           </a:p>
           <a:p>
             <a:pPr lvl="2"/>
             <a:r>
-              <a:rPr lang="zh-TW" altLang="en-US" smtClean="0"/>
+              <a:rPr lang="zh-TW" altLang="en-US"/>
               <a:t>第三層</a:t>
             </a:r>
           </a:p>
           <a:p>
             <a:pPr lvl="3"/>
             <a:r>
-              <a:rPr lang="zh-TW" altLang="en-US" smtClean="0"/>
+              <a:rPr lang="zh-TW" altLang="en-US"/>
               <a:t>第四層</a:t>
             </a:r>
           </a:p>
           <a:p>
             <a:pPr lvl="4"/>
             <a:r>
-              <a:rPr lang="zh-TW" altLang="en-US" smtClean="0"/>
+              <a:rPr lang="zh-TW" altLang="en-US"/>
               <a:t>第五層</a:t>
             </a:r>
             <a:endParaRPr lang="zh-HK" altLang="en-US"/>
@@ -1332,7 +1346,7 @@
           <a:p>
             <a:fld id="{B6108ED8-30D0-49CE-A407-2D3D905DC7AD}" type="datetimeFigureOut">
               <a:rPr lang="zh-HK" altLang="en-US" smtClean="0"/>
-              <a:t>27/12/2025</a:t>
+              <a:t>1/9/2026</a:t>
             </a:fld>
             <a:endParaRPr lang="zh-HK" altLang="en-US"/>
           </a:p>
@@ -1431,7 +1445,7 @@
           <a:lstStyle/>
           <a:p>
             <a:r>
-              <a:rPr lang="zh-TW" altLang="en-US" smtClean="0"/>
+              <a:rPr lang="zh-TW" altLang="en-US"/>
               <a:t>按一下以編輯母片標題樣式</a:t>
             </a:r>
             <a:endParaRPr lang="zh-HK" altLang="en-US"/>
@@ -1497,7 +1511,7 @@
           <a:p>
             <a:pPr lvl="0"/>
             <a:r>
-              <a:rPr lang="zh-TW" altLang="en-US" smtClean="0"/>
+              <a:rPr lang="zh-TW" altLang="en-US"/>
               <a:t>按一下以編輯母片文字樣式</a:t>
             </a:r>
           </a:p>
@@ -1525,35 +1539,35 @@
           <a:p>
             <a:pPr lvl="0"/>
             <a:r>
-              <a:rPr lang="zh-TW" altLang="en-US" smtClean="0"/>
+              <a:rPr lang="zh-TW" altLang="en-US"/>
               <a:t>按一下以編輯母片文字樣式</a:t>
             </a:r>
           </a:p>
           <a:p>
             <a:pPr lvl="1"/>
             <a:r>
-              <a:rPr lang="zh-TW" altLang="en-US" smtClean="0"/>
+              <a:rPr lang="zh-TW" altLang="en-US"/>
               <a:t>第二層</a:t>
             </a:r>
           </a:p>
           <a:p>
             <a:pPr lvl="2"/>
             <a:r>
-              <a:rPr lang="zh-TW" altLang="en-US" smtClean="0"/>
+              <a:rPr lang="zh-TW" altLang="en-US"/>
               <a:t>第三層</a:t>
             </a:r>
           </a:p>
           <a:p>
             <a:pPr lvl="3"/>
             <a:r>
-              <a:rPr lang="zh-TW" altLang="en-US" smtClean="0"/>
+              <a:rPr lang="zh-TW" altLang="en-US"/>
               <a:t>第四層</a:t>
             </a:r>
           </a:p>
           <a:p>
             <a:pPr lvl="4"/>
             <a:r>
-              <a:rPr lang="zh-TW" altLang="en-US" smtClean="0"/>
+              <a:rPr lang="zh-TW" altLang="en-US"/>
               <a:t>第五層</a:t>
             </a:r>
             <a:endParaRPr lang="zh-HK" altLang="en-US"/>
@@ -1619,7 +1633,7 @@
           <a:p>
             <a:pPr lvl="0"/>
             <a:r>
-              <a:rPr lang="zh-TW" altLang="en-US" smtClean="0"/>
+              <a:rPr lang="zh-TW" altLang="en-US"/>
               <a:t>按一下以編輯母片文字樣式</a:t>
             </a:r>
           </a:p>
@@ -1647,35 +1661,35 @@
           <a:p>
             <a:pPr lvl="0"/>
             <a:r>
-              <a:rPr lang="zh-TW" altLang="en-US" smtClean="0"/>
+              <a:rPr lang="zh-TW" altLang="en-US"/>
               <a:t>按一下以編輯母片文字樣式</a:t>
             </a:r>
           </a:p>
           <a:p>
             <a:pPr lvl="1"/>
             <a:r>
-              <a:rPr lang="zh-TW" altLang="en-US" smtClean="0"/>
+              <a:rPr lang="zh-TW" altLang="en-US"/>
               <a:t>第二層</a:t>
             </a:r>
           </a:p>
           <a:p>
             <a:pPr lvl="2"/>
             <a:r>
-              <a:rPr lang="zh-TW" altLang="en-US" smtClean="0"/>
+              <a:rPr lang="zh-TW" altLang="en-US"/>
               <a:t>第三層</a:t>
             </a:r>
           </a:p>
           <a:p>
             <a:pPr lvl="3"/>
             <a:r>
-              <a:rPr lang="zh-TW" altLang="en-US" smtClean="0"/>
+              <a:rPr lang="zh-TW" altLang="en-US"/>
               <a:t>第四層</a:t>
             </a:r>
           </a:p>
           <a:p>
             <a:pPr lvl="4"/>
             <a:r>
-              <a:rPr lang="zh-TW" altLang="en-US" smtClean="0"/>
+              <a:rPr lang="zh-TW" altLang="en-US"/>
               <a:t>第五層</a:t>
             </a:r>
             <a:endParaRPr lang="zh-HK" altLang="en-US"/>
@@ -1699,7 +1713,7 @@
           <a:p>
             <a:fld id="{B6108ED8-30D0-49CE-A407-2D3D905DC7AD}" type="datetimeFigureOut">
               <a:rPr lang="zh-HK" altLang="en-US" smtClean="0"/>
-              <a:t>27/12/2025</a:t>
+              <a:t>1/9/2026</a:t>
             </a:fld>
             <a:endParaRPr lang="zh-HK" altLang="en-US"/>
           </a:p>
@@ -1793,7 +1807,7 @@
           <a:lstStyle/>
           <a:p>
             <a:r>
-              <a:rPr lang="zh-TW" altLang="en-US" smtClean="0"/>
+              <a:rPr lang="zh-TW" altLang="en-US"/>
               <a:t>按一下以編輯母片標題樣式</a:t>
             </a:r>
             <a:endParaRPr lang="zh-HK" altLang="en-US"/>
@@ -1817,7 +1831,7 @@
           <a:p>
             <a:fld id="{B6108ED8-30D0-49CE-A407-2D3D905DC7AD}" type="datetimeFigureOut">
               <a:rPr lang="zh-HK" altLang="en-US" smtClean="0"/>
-              <a:t>27/12/2025</a:t>
+              <a:t>1/9/2026</a:t>
             </a:fld>
             <a:endParaRPr lang="zh-HK" altLang="en-US"/>
           </a:p>
@@ -1912,7 +1926,7 @@
           <a:p>
             <a:fld id="{B6108ED8-30D0-49CE-A407-2D3D905DC7AD}" type="datetimeFigureOut">
               <a:rPr lang="zh-HK" altLang="en-US" smtClean="0"/>
-              <a:t>27/12/2025</a:t>
+              <a:t>1/9/2026</a:t>
             </a:fld>
             <a:endParaRPr lang="zh-HK" altLang="en-US"/>
           </a:p>
@@ -2015,7 +2029,7 @@
           </a:lstStyle>
           <a:p>
             <a:r>
-              <a:rPr lang="zh-TW" altLang="en-US" smtClean="0"/>
+              <a:rPr lang="zh-TW" altLang="en-US"/>
               <a:t>按一下以編輯母片標題樣式</a:t>
             </a:r>
             <a:endParaRPr lang="zh-HK" altLang="en-US"/>
@@ -2072,35 +2086,35 @@
           <a:p>
             <a:pPr lvl="0"/>
             <a:r>
-              <a:rPr lang="zh-TW" altLang="en-US" smtClean="0"/>
+              <a:rPr lang="zh-TW" altLang="en-US"/>
               <a:t>按一下以編輯母片文字樣式</a:t>
             </a:r>
           </a:p>
           <a:p>
             <a:pPr lvl="1"/>
             <a:r>
-              <a:rPr lang="zh-TW" altLang="en-US" smtClean="0"/>
+              <a:rPr lang="zh-TW" altLang="en-US"/>
               <a:t>第二層</a:t>
             </a:r>
           </a:p>
           <a:p>
             <a:pPr lvl="2"/>
             <a:r>
-              <a:rPr lang="zh-TW" altLang="en-US" smtClean="0"/>
+              <a:rPr lang="zh-TW" altLang="en-US"/>
               <a:t>第三層</a:t>
             </a:r>
           </a:p>
           <a:p>
             <a:pPr lvl="3"/>
             <a:r>
-              <a:rPr lang="zh-TW" altLang="en-US" smtClean="0"/>
+              <a:rPr lang="zh-TW" altLang="en-US"/>
               <a:t>第四層</a:t>
             </a:r>
           </a:p>
           <a:p>
             <a:pPr lvl="4"/>
             <a:r>
-              <a:rPr lang="zh-TW" altLang="en-US" smtClean="0"/>
+              <a:rPr lang="zh-TW" altLang="en-US"/>
               <a:t>第五層</a:t>
             </a:r>
             <a:endParaRPr lang="zh-HK" altLang="en-US"/>
@@ -2166,7 +2180,7 @@
           <a:p>
             <a:pPr lvl="0"/>
             <a:r>
-              <a:rPr lang="zh-TW" altLang="en-US" smtClean="0"/>
+              <a:rPr lang="zh-TW" altLang="en-US"/>
               <a:t>按一下以編輯母片文字樣式</a:t>
             </a:r>
           </a:p>
@@ -2189,7 +2203,7 @@
           <a:p>
             <a:fld id="{B6108ED8-30D0-49CE-A407-2D3D905DC7AD}" type="datetimeFigureOut">
               <a:rPr lang="zh-HK" altLang="en-US" smtClean="0"/>
-              <a:t>27/12/2025</a:t>
+              <a:t>1/9/2026</a:t>
             </a:fld>
             <a:endParaRPr lang="zh-HK" altLang="en-US"/>
           </a:p>
@@ -2292,7 +2306,7 @@
           </a:lstStyle>
           <a:p>
             <a:r>
-              <a:rPr lang="zh-TW" altLang="en-US" smtClean="0"/>
+              <a:rPr lang="zh-TW" altLang="en-US"/>
               <a:t>按一下以編輯母片標題樣式</a:t>
             </a:r>
             <a:endParaRPr lang="zh-HK" altLang="en-US"/>
@@ -2419,7 +2433,7 @@
           <a:p>
             <a:pPr lvl="0"/>
             <a:r>
-              <a:rPr lang="zh-TW" altLang="en-US" smtClean="0"/>
+              <a:rPr lang="zh-TW" altLang="en-US"/>
               <a:t>按一下以編輯母片文字樣式</a:t>
             </a:r>
           </a:p>
@@ -2442,7 +2456,7 @@
           <a:p>
             <a:fld id="{B6108ED8-30D0-49CE-A407-2D3D905DC7AD}" type="datetimeFigureOut">
               <a:rPr lang="zh-HK" altLang="en-US" smtClean="0"/>
-              <a:t>27/12/2025</a:t>
+              <a:t>1/9/2026</a:t>
             </a:fld>
             <a:endParaRPr lang="zh-HK" altLang="en-US"/>
           </a:p>
@@ -2507,9 +2521,15 @@
 <p:sldMaster xmlns:a="http://schemas.openxmlformats.org/drawingml/2006/main" xmlns:r="http://schemas.openxmlformats.org/officeDocument/2006/relationships" xmlns:p="http://schemas.openxmlformats.org/presentationml/2006/main" preserve="1">
   <p:cSld>
     <p:bg>
-      <p:bgRef idx="1001">
-        <a:schemeClr val="bg1"/>
-      </p:bgRef>
+      <p:bgPr>
+        <a:blipFill>
+          <a:blip r:embed="rId13"/>
+          <a:stretch>
+            <a:fillRect/>
+          </a:stretch>
+        </a:blipFill>
+        <a:effectLst/>
+      </p:bgPr>
     </p:bg>
     <p:spTree>
       <p:nvGrpSpPr>
@@ -2551,7 +2571,7 @@
           <a:lstStyle/>
           <a:p>
             <a:r>
-              <a:rPr lang="zh-TW" altLang="en-US" smtClean="0"/>
+              <a:rPr lang="zh-TW" altLang="en-US"/>
               <a:t>按一下以編輯母片標題樣式</a:t>
             </a:r>
             <a:endParaRPr lang="zh-HK" altLang="en-US"/>
@@ -2585,35 +2605,35 @@
           <a:p>
             <a:pPr lvl="0"/>
             <a:r>
-              <a:rPr lang="zh-TW" altLang="en-US" smtClean="0"/>
+              <a:rPr lang="zh-TW" altLang="en-US"/>
               <a:t>按一下以編輯母片文字樣式</a:t>
             </a:r>
           </a:p>
           <a:p>
             <a:pPr lvl="1"/>
             <a:r>
-              <a:rPr lang="zh-TW" altLang="en-US" smtClean="0"/>
+              <a:rPr lang="zh-TW" altLang="en-US"/>
               <a:t>第二層</a:t>
             </a:r>
           </a:p>
           <a:p>
             <a:pPr lvl="2"/>
             <a:r>
-              <a:rPr lang="zh-TW" altLang="en-US" smtClean="0"/>
+              <a:rPr lang="zh-TW" altLang="en-US"/>
               <a:t>第三層</a:t>
             </a:r>
           </a:p>
           <a:p>
             <a:pPr lvl="3"/>
             <a:r>
-              <a:rPr lang="zh-TW" altLang="en-US" smtClean="0"/>
+              <a:rPr lang="zh-TW" altLang="en-US"/>
               <a:t>第四層</a:t>
             </a:r>
           </a:p>
           <a:p>
             <a:pPr lvl="4"/>
             <a:r>
-              <a:rPr lang="zh-TW" altLang="en-US" smtClean="0"/>
+              <a:rPr lang="zh-TW" altLang="en-US"/>
               <a:t>第五層</a:t>
             </a:r>
             <a:endParaRPr lang="zh-HK" altLang="en-US"/>
@@ -2655,7 +2675,7 @@
           <a:p>
             <a:fld id="{B6108ED8-30D0-49CE-A407-2D3D905DC7AD}" type="datetimeFigureOut">
               <a:rPr lang="zh-HK" altLang="en-US" smtClean="0"/>
-              <a:t>27/12/2025</a:t>
+              <a:t>1/9/2026</a:t>
             </a:fld>
             <a:endParaRPr lang="zh-HK" altLang="en-US"/>
           </a:p>
@@ -3047,9 +3067,15 @@
 <p:sldMaster xmlns:a="http://schemas.openxmlformats.org/drawingml/2006/main" xmlns:r="http://schemas.openxmlformats.org/officeDocument/2006/relationships" xmlns:p="http://schemas.openxmlformats.org/presentationml/2006/main" preserve="1">
   <p:cSld>
     <p:bg>
-      <p:bgRef idx="1001">
-        <a:schemeClr val="bg1"/>
-      </p:bgRef>
+      <p:bgPr>
+        <a:blipFill>
+          <a:blip r:embed="rId3"/>
+          <a:stretch>
+            <a:fillRect/>
+          </a:stretch>
+        </a:blipFill>
+        <a:effectLst/>
+      </p:bgPr>
     </p:bg>
     <p:spTree>
       <p:nvGrpSpPr>
@@ -3195,7 +3221,7 @@
           <a:p>
             <a:fld id="{E1FA0923-53A4-4EF9-8D36-2211106C1081}" type="datetimeFigureOut">
               <a:rPr lang="zh-HK" altLang="en-US" smtClean="0"/>
-              <a:t>27/12/2025</a:t>
+              <a:t>1/9/2026</a:t>
             </a:fld>
             <a:endParaRPr lang="zh-HK" altLang="en-US"/>
           </a:p>
@@ -3284,7 +3310,7 @@
           <p:cNvPr id="8" name="圖片 7" descr="一張含有 文字, 標誌, 字型, 圖形 的圖片&#10;&#10;自動產生的描述">
             <a:extLst>
               <a:ext uri="{FF2B5EF4-FFF2-40B4-BE49-F238E27FC236}">
-                <a16:creationId xmlns="" xmlns:a16="http://schemas.microsoft.com/office/drawing/2014/main" id="{2B6D0C4E-70EF-5D9F-A1A5-9C959FB07CA3}"/>
+                <a16:creationId xmlns:a16="http://schemas.microsoft.com/office/drawing/2014/main" id="{2B6D0C4E-70EF-5D9F-A1A5-9C959FB07CA3}"/>
               </a:ext>
             </a:extLst>
           </p:cNvPr>
@@ -3294,7 +3320,7 @@
           <p:nvPr userDrawn="1"/>
         </p:nvPicPr>
         <p:blipFill>
-          <a:blip r:embed="rId3">
+          <a:blip r:embed="rId4">
             <a:extLst>
               <a:ext uri="{28A0092B-C50C-407E-A947-70E740481C1C}">
                 <a14:useLocalDpi xmlns:a14="http://schemas.microsoft.com/office/drawing/2010/main" val="0"/>
@@ -3612,14 +3638,6 @@
 <file path=ppt/slides/slide1.xml><?xml version="1.0" encoding="utf-8"?>
 <p:sld xmlns:a="http://schemas.openxmlformats.org/drawingml/2006/main" xmlns:r="http://schemas.openxmlformats.org/officeDocument/2006/relationships" xmlns:p="http://schemas.openxmlformats.org/presentationml/2006/main">
   <p:cSld>
-    <p:bg>
-      <p:bgPr>
-        <a:solidFill>
-          <a:srgbClr val="FAD9C2"/>
-        </a:solidFill>
-        <a:effectLst/>
-      </p:bgPr>
-    </p:bg>
     <p:spTree>
       <p:nvGrpSpPr>
         <p:cNvPr id="1" name=""/>
@@ -3634,46 +3652,16 @@
           <a:chExt cx="0" cy="0"/>
         </a:xfrm>
       </p:grpSpPr>
-      <p:pic>
-        <p:nvPicPr>
-          <p:cNvPr id="4" name="圖片 3"/>
-          <p:cNvPicPr>
-            <a:picLocks noChangeAspect="1"/>
-          </p:cNvPicPr>
+      <p:sp>
+        <p:nvSpPr>
+          <p:cNvPr id="6" name="矩形 5"/>
+          <p:cNvSpPr/>
           <p:nvPr/>
-        </p:nvPicPr>
-        <p:blipFill>
-          <a:blip r:embed="rId2" cstate="print">
-            <a:extLst>
-              <a:ext uri="{28A0092B-C50C-407E-A947-70E740481C1C}">
-                <a14:useLocalDpi xmlns:a14="http://schemas.microsoft.com/office/drawing/2010/main" val="0"/>
-              </a:ext>
-            </a:extLst>
-          </a:blip>
-          <a:stretch>
-            <a:fillRect/>
-          </a:stretch>
-        </p:blipFill>
+        </p:nvSpPr>
         <p:spPr>
           <a:xfrm>
-            <a:off x="7723022" y="0"/>
-            <a:ext cx="4468978" cy="5755341"/>
-          </a:xfrm>
-          <a:prstGeom prst="rect">
-            <a:avLst/>
-          </a:prstGeom>
-        </p:spPr>
-      </p:pic>
-      <p:sp>
-        <p:nvSpPr>
-          <p:cNvPr id="5" name="矩形 4"/>
-          <p:cNvSpPr/>
-          <p:nvPr/>
-        </p:nvSpPr>
-        <p:spPr>
-          <a:xfrm>
-            <a:off x="294594" y="451882"/>
-            <a:ext cx="3265638" cy="1938992"/>
+            <a:off x="816668" y="3656392"/>
+            <a:ext cx="4188219" cy="1579820"/>
           </a:xfrm>
           <a:prstGeom prst="rect">
             <a:avLst/>
@@ -3681,65 +3669,17 @@
           <a:noFill/>
         </p:spPr>
         <p:txBody>
-          <a:bodyPr wrap="none" lIns="91440" tIns="45720" rIns="91440" bIns="45720">
+          <a:bodyPr wrap="square" lIns="91440" tIns="45720" rIns="91440" bIns="45720" anchor="t">
             <a:spAutoFit/>
           </a:bodyPr>
           <a:lstStyle/>
           <a:p>
             <a:pPr algn="ctr"/>
             <a:r>
-              <a:rPr lang="zh-TW" altLang="en-US" sz="12000" b="1" dirty="0" smtClean="0">
-                <a:ln w="22225">
-                  <a:noFill/>
-                  <a:prstDash val="solid"/>
-                </a:ln>
+              <a:rPr lang="zh-TW" altLang="en-US" sz="9600" b="1" cap="none" spc="0" dirty="0">
+                <a:ln w="0"/>
                 <a:solidFill>
                   <a:srgbClr val="7030A0"/>
-                </a:solidFill>
-              </a:rPr>
-              <a:t>道顯</a:t>
-            </a:r>
-            <a:endParaRPr lang="zh-TW" altLang="en-US" sz="12000" b="1" cap="none" spc="0" dirty="0">
-              <a:ln w="22225">
-                <a:noFill/>
-                <a:prstDash val="solid"/>
-              </a:ln>
-              <a:solidFill>
-                <a:srgbClr val="7030A0"/>
-              </a:solidFill>
-              <a:effectLst/>
-            </a:endParaRPr>
-          </a:p>
-        </p:txBody>
-      </p:sp>
-      <p:sp>
-        <p:nvSpPr>
-          <p:cNvPr id="6" name="矩形 5"/>
-          <p:cNvSpPr/>
-          <p:nvPr/>
-        </p:nvSpPr>
-        <p:spPr>
-          <a:xfrm>
-            <a:off x="1442489" y="2538792"/>
-            <a:ext cx="5307863" cy="1938992"/>
-          </a:xfrm>
-          <a:prstGeom prst="rect">
-            <a:avLst/>
-          </a:prstGeom>
-          <a:noFill/>
-        </p:spPr>
-        <p:txBody>
-          <a:bodyPr wrap="none" lIns="91440" tIns="45720" rIns="91440" bIns="45720">
-            <a:spAutoFit/>
-          </a:bodyPr>
-          <a:lstStyle/>
-          <a:p>
-            <a:pPr algn="ctr"/>
-            <a:r>
-              <a:rPr lang="zh-TW" altLang="en-US" sz="12000" b="1" cap="none" spc="0" dirty="0" smtClean="0">
-                <a:ln w="0"/>
-                <a:solidFill>
-                  <a:srgbClr val="660033"/>
                 </a:solidFill>
                 <a:effectLst>
                   <a:outerShdw blurRad="38100" dist="19050" dir="2700000" algn="tl" rotWithShape="0">
@@ -3748,14 +3688,16 @@
                     </a:schemeClr>
                   </a:outerShdw>
                 </a:effectLst>
+                <a:latin typeface="Microsoft JhengHei"/>
+                <a:ea typeface="Microsoft JhengHei"/>
               </a:rPr>
               <a:t>歡迎您</a:t>
             </a:r>
             <a:r>
-              <a:rPr lang="en-US" altLang="zh-TW" sz="12000" b="1" cap="none" spc="0" dirty="0" smtClean="0">
+              <a:rPr lang="en-US" altLang="zh-TW" sz="9600" b="1" cap="none" spc="0" dirty="0">
                 <a:ln w="0"/>
                 <a:solidFill>
-                  <a:srgbClr val="660033"/>
+                  <a:srgbClr val="7030A0"/>
                 </a:solidFill>
                 <a:effectLst>
                   <a:outerShdw blurRad="38100" dist="19050" dir="2700000" algn="tl" rotWithShape="0">
@@ -3764,21 +3706,92 @@
                     </a:schemeClr>
                   </a:outerShdw>
                 </a:effectLst>
+                <a:latin typeface="Microsoft JhengHei"/>
+                <a:ea typeface="Microsoft JhengHei"/>
               </a:rPr>
               <a:t>!</a:t>
             </a:r>
-            <a:endParaRPr lang="zh-TW" altLang="en-US" sz="12000" b="1" cap="none" spc="0" dirty="0">
+            <a:endParaRPr lang="zh-TW" altLang="en-US" sz="9600" b="1" cap="none" spc="0" dirty="0">
               <a:ln w="0"/>
               <a:solidFill>
-                <a:srgbClr val="660033"/>
+                <a:srgbClr val="7030A0"/>
               </a:solidFill>
               <a:effectLst>
                 <a:outerShdw blurRad="38100" dist="19050" dir="2700000" algn="tl" rotWithShape="0">
-                  <a:schemeClr val="dk1">
+                  <a:prstClr val="black">
                     <a:alpha val="40000"/>
-                  </a:schemeClr>
+                  </a:prstClr>
                 </a:outerShdw>
               </a:effectLst>
+              <a:latin typeface="Microsoft JhengHei"/>
+              <a:ea typeface="Microsoft JhengHei"/>
+            </a:endParaRPr>
+          </a:p>
+        </p:txBody>
+      </p:sp>
+      <p:sp>
+        <p:nvSpPr>
+          <p:cNvPr id="3" name="矩形 5">
+            <a:extLst>
+              <a:ext uri="{FF2B5EF4-FFF2-40B4-BE49-F238E27FC236}">
+                <a16:creationId xmlns:a16="http://schemas.microsoft.com/office/drawing/2014/main" id="{133FC13B-3299-746F-96C8-190F4EBEB1B7}"/>
+              </a:ext>
+            </a:extLst>
+          </p:cNvPr>
+          <p:cNvSpPr/>
+          <p:nvPr/>
+        </p:nvSpPr>
+        <p:spPr>
+          <a:xfrm>
+            <a:off x="402725" y="1715831"/>
+            <a:ext cx="4603552" cy="1938992"/>
+          </a:xfrm>
+          <a:prstGeom prst="rect">
+            <a:avLst/>
+          </a:prstGeom>
+          <a:noFill/>
+        </p:spPr>
+        <p:txBody>
+          <a:bodyPr wrap="square" lIns="91440" tIns="45720" rIns="91440" bIns="45720" anchor="t">
+            <a:spAutoFit/>
+          </a:bodyPr>
+          <a:lstStyle/>
+          <a:p>
+            <a:pPr algn="ctr"/>
+            <a:r>
+              <a:rPr lang="en-US" altLang="zh-TW" sz="12000" b="1" dirty="0" err="1">
+                <a:ln w="0"/>
+                <a:solidFill>
+                  <a:srgbClr val="C00000"/>
+                </a:solidFill>
+                <a:effectLst>
+                  <a:outerShdw blurRad="38100" dist="19050" dir="2700000" algn="tl" rotWithShape="0">
+                    <a:prstClr val="black">
+                      <a:alpha val="40000"/>
+                    </a:prstClr>
+                  </a:outerShdw>
+                </a:effectLst>
+                <a:latin typeface="Microsoft JhengHei"/>
+                <a:ea typeface="Microsoft JhengHei"/>
+                <a:cs typeface="Calibri"/>
+              </a:rPr>
+              <a:t>我們</a:t>
+            </a:r>
+            <a:endParaRPr lang="en-US" altLang="zh-TW" sz="12000" b="1">
+              <a:ln w="0"/>
+              <a:solidFill>
+                <a:srgbClr val="C00000"/>
+              </a:solidFill>
+              <a:effectLst>
+                <a:outerShdw blurRad="38100" dist="19050" dir="2700000" algn="tl" rotWithShape="0">
+                  <a:prstClr val="black">
+                    <a:alpha val="40000"/>
+                  </a:prstClr>
+                </a:outerShdw>
+              </a:effectLst>
+              <a:latin typeface="Microsoft JhengHei"/>
+              <a:ea typeface="Microsoft JhengHei"/>
+              <a:cs typeface="Calibri"/>
             </a:endParaRPr>
           </a:p>
         </p:txBody>
